--- a/詩篇第二十三篇_version_2.pptx
+++ b/詩篇第二十三篇_version_2.pptx
@@ -114,6 +114,22 @@
       </a:defRPr>
     </a:lvl9pPr>
   </p:defaultTextStyle>
+  <p:extLst>
+    <p:ext uri="{EFAFB233-063F-42B5-8137-9DF3F51BA10A}">
+      <p15:sldGuideLst xmlns:p15="http://schemas.microsoft.com/office/powerpoint/2012/main">
+        <p15:guide id="1" orient="horz" pos="1620">
+          <p15:clr>
+            <a:srgbClr val="A4A3A4"/>
+          </p15:clr>
+        </p15:guide>
+        <p15:guide id="2" pos="2880">
+          <p15:clr>
+            <a:srgbClr val="A4A3A4"/>
+          </p15:clr>
+        </p15:guide>
+      </p15:sldGuideLst>
+    </p:ext>
+  </p:extLst>
 </p:presentation>
 </file>
 
@@ -155,10 +171,9 @@
           <a:lstStyle/>
           <a:p>
             <a:r>
-              <a:rPr lang="zh-TW" altLang="en-US" smtClean="0"/>
+              <a:rPr lang="zh-TW" altLang="en-US"/>
               <a:t>按一下以編輯母片標題樣式</a:t>
             </a:r>
-            <a:endParaRPr lang="zh-TW" altLang="en-US"/>
           </a:p>
         </p:txBody>
       </p:sp>
@@ -274,10 +289,9 @@
           </a:lstStyle>
           <a:p>
             <a:r>
-              <a:rPr lang="zh-TW" altLang="en-US" smtClean="0"/>
+              <a:rPr lang="zh-TW" altLang="en-US"/>
               <a:t>按一下以編輯母片副標題樣式</a:t>
             </a:r>
-            <a:endParaRPr lang="zh-TW" altLang="en-US"/>
           </a:p>
         </p:txBody>
       </p:sp>
@@ -299,7 +313,7 @@
             <a:fld id="{93ECE03C-A371-4485-BF1E-27D7131881BB}" type="datetimeFigureOut">
               <a:rPr lang="zh-TW" altLang="en-US" smtClean="0"/>
               <a:pPr/>
-              <a:t>2022/11/12</a:t>
+              <a:t>2024/9/6</a:t>
             </a:fld>
             <a:endParaRPr lang="zh-TW" altLang="en-US"/>
           </a:p>
@@ -389,10 +403,9 @@
           <a:lstStyle/>
           <a:p>
             <a:r>
-              <a:rPr lang="zh-TW" altLang="en-US" smtClean="0"/>
+              <a:rPr lang="zh-TW" altLang="en-US"/>
               <a:t>按一下以編輯母片標題樣式</a:t>
             </a:r>
-            <a:endParaRPr lang="zh-TW" altLang="en-US"/>
           </a:p>
         </p:txBody>
       </p:sp>
@@ -413,38 +426,37 @@
           <a:p>
             <a:pPr lvl="0"/>
             <a:r>
-              <a:rPr lang="zh-TW" altLang="en-US" smtClean="0"/>
+              <a:rPr lang="zh-TW" altLang="en-US"/>
               <a:t>按一下以編輯母片文字樣式</a:t>
             </a:r>
           </a:p>
           <a:p>
             <a:pPr lvl="1"/>
             <a:r>
-              <a:rPr lang="zh-TW" altLang="en-US" smtClean="0"/>
+              <a:rPr lang="zh-TW" altLang="en-US"/>
               <a:t>第二層</a:t>
             </a:r>
           </a:p>
           <a:p>
             <a:pPr lvl="2"/>
             <a:r>
-              <a:rPr lang="zh-TW" altLang="en-US" smtClean="0"/>
+              <a:rPr lang="zh-TW" altLang="en-US"/>
               <a:t>第三層</a:t>
             </a:r>
           </a:p>
           <a:p>
             <a:pPr lvl="3"/>
             <a:r>
-              <a:rPr lang="zh-TW" altLang="en-US" smtClean="0"/>
+              <a:rPr lang="zh-TW" altLang="en-US"/>
               <a:t>第四層</a:t>
             </a:r>
           </a:p>
           <a:p>
             <a:pPr lvl="4"/>
             <a:r>
-              <a:rPr lang="zh-TW" altLang="en-US" smtClean="0"/>
+              <a:rPr lang="zh-TW" altLang="en-US"/>
               <a:t>第五層</a:t>
             </a:r>
-            <a:endParaRPr lang="zh-TW" altLang="en-US"/>
           </a:p>
         </p:txBody>
       </p:sp>
@@ -466,7 +478,7 @@
             <a:fld id="{93ECE03C-A371-4485-BF1E-27D7131881BB}" type="datetimeFigureOut">
               <a:rPr lang="zh-TW" altLang="en-US" smtClean="0"/>
               <a:pPr/>
-              <a:t>2022/11/12</a:t>
+              <a:t>2024/9/6</a:t>
             </a:fld>
             <a:endParaRPr lang="zh-TW" altLang="en-US"/>
           </a:p>
@@ -561,10 +573,9 @@
           <a:lstStyle/>
           <a:p>
             <a:r>
-              <a:rPr lang="zh-TW" altLang="en-US" smtClean="0"/>
+              <a:rPr lang="zh-TW" altLang="en-US"/>
               <a:t>按一下以編輯母片標題樣式</a:t>
             </a:r>
-            <a:endParaRPr lang="zh-TW" altLang="en-US"/>
           </a:p>
         </p:txBody>
       </p:sp>
@@ -590,38 +601,37 @@
           <a:p>
             <a:pPr lvl="0"/>
             <a:r>
-              <a:rPr lang="zh-TW" altLang="en-US" smtClean="0"/>
+              <a:rPr lang="zh-TW" altLang="en-US"/>
               <a:t>按一下以編輯母片文字樣式</a:t>
             </a:r>
           </a:p>
           <a:p>
             <a:pPr lvl="1"/>
             <a:r>
-              <a:rPr lang="zh-TW" altLang="en-US" smtClean="0"/>
+              <a:rPr lang="zh-TW" altLang="en-US"/>
               <a:t>第二層</a:t>
             </a:r>
           </a:p>
           <a:p>
             <a:pPr lvl="2"/>
             <a:r>
-              <a:rPr lang="zh-TW" altLang="en-US" smtClean="0"/>
+              <a:rPr lang="zh-TW" altLang="en-US"/>
               <a:t>第三層</a:t>
             </a:r>
           </a:p>
           <a:p>
             <a:pPr lvl="3"/>
             <a:r>
-              <a:rPr lang="zh-TW" altLang="en-US" smtClean="0"/>
+              <a:rPr lang="zh-TW" altLang="en-US"/>
               <a:t>第四層</a:t>
             </a:r>
           </a:p>
           <a:p>
             <a:pPr lvl="4"/>
             <a:r>
-              <a:rPr lang="zh-TW" altLang="en-US" smtClean="0"/>
+              <a:rPr lang="zh-TW" altLang="en-US"/>
               <a:t>第五層</a:t>
             </a:r>
-            <a:endParaRPr lang="zh-TW" altLang="en-US"/>
           </a:p>
         </p:txBody>
       </p:sp>
@@ -643,7 +653,7 @@
             <a:fld id="{93ECE03C-A371-4485-BF1E-27D7131881BB}" type="datetimeFigureOut">
               <a:rPr lang="zh-TW" altLang="en-US" smtClean="0"/>
               <a:pPr/>
-              <a:t>2022/11/12</a:t>
+              <a:t>2024/9/6</a:t>
             </a:fld>
             <a:endParaRPr lang="zh-TW" altLang="en-US"/>
           </a:p>
@@ -733,10 +743,9 @@
           <a:lstStyle/>
           <a:p>
             <a:r>
-              <a:rPr lang="zh-TW" altLang="en-US" smtClean="0"/>
+              <a:rPr lang="zh-TW" altLang="en-US"/>
               <a:t>按一下以編輯母片標題樣式</a:t>
             </a:r>
-            <a:endParaRPr lang="zh-TW" altLang="en-US"/>
           </a:p>
         </p:txBody>
       </p:sp>
@@ -757,38 +766,37 @@
           <a:p>
             <a:pPr lvl="0"/>
             <a:r>
-              <a:rPr lang="zh-TW" altLang="en-US" smtClean="0"/>
+              <a:rPr lang="zh-TW" altLang="en-US"/>
               <a:t>按一下以編輯母片文字樣式</a:t>
             </a:r>
           </a:p>
           <a:p>
             <a:pPr lvl="1"/>
             <a:r>
-              <a:rPr lang="zh-TW" altLang="en-US" smtClean="0"/>
+              <a:rPr lang="zh-TW" altLang="en-US"/>
               <a:t>第二層</a:t>
             </a:r>
           </a:p>
           <a:p>
             <a:pPr lvl="2"/>
             <a:r>
-              <a:rPr lang="zh-TW" altLang="en-US" smtClean="0"/>
+              <a:rPr lang="zh-TW" altLang="en-US"/>
               <a:t>第三層</a:t>
             </a:r>
           </a:p>
           <a:p>
             <a:pPr lvl="3"/>
             <a:r>
-              <a:rPr lang="zh-TW" altLang="en-US" smtClean="0"/>
+              <a:rPr lang="zh-TW" altLang="en-US"/>
               <a:t>第四層</a:t>
             </a:r>
           </a:p>
           <a:p>
             <a:pPr lvl="4"/>
             <a:r>
-              <a:rPr lang="zh-TW" altLang="en-US" smtClean="0"/>
+              <a:rPr lang="zh-TW" altLang="en-US"/>
               <a:t>第五層</a:t>
             </a:r>
-            <a:endParaRPr lang="zh-TW" altLang="en-US"/>
           </a:p>
         </p:txBody>
       </p:sp>
@@ -810,7 +818,7 @@
             <a:fld id="{93ECE03C-A371-4485-BF1E-27D7131881BB}" type="datetimeFigureOut">
               <a:rPr lang="zh-TW" altLang="en-US" smtClean="0"/>
               <a:pPr/>
-              <a:t>2022/11/12</a:t>
+              <a:t>2024/9/6</a:t>
             </a:fld>
             <a:endParaRPr lang="zh-TW" altLang="en-US"/>
           </a:p>
@@ -909,10 +917,9 @@
           </a:lstStyle>
           <a:p>
             <a:r>
-              <a:rPr lang="zh-TW" altLang="en-US" smtClean="0"/>
+              <a:rPr lang="zh-TW" altLang="en-US"/>
               <a:t>按一下以編輯母片標題樣式</a:t>
             </a:r>
-            <a:endParaRPr lang="zh-TW" altLang="en-US"/>
           </a:p>
         </p:txBody>
       </p:sp>
@@ -1029,7 +1036,7 @@
           <a:p>
             <a:pPr lvl="0"/>
             <a:r>
-              <a:rPr lang="zh-TW" altLang="en-US" smtClean="0"/>
+              <a:rPr lang="zh-TW" altLang="en-US"/>
               <a:t>按一下以編輯母片文字樣式</a:t>
             </a:r>
           </a:p>
@@ -1053,7 +1060,7 @@
             <a:fld id="{93ECE03C-A371-4485-BF1E-27D7131881BB}" type="datetimeFigureOut">
               <a:rPr lang="zh-TW" altLang="en-US" smtClean="0"/>
               <a:pPr/>
-              <a:t>2022/11/12</a:t>
+              <a:t>2024/9/6</a:t>
             </a:fld>
             <a:endParaRPr lang="zh-TW" altLang="en-US"/>
           </a:p>
@@ -1143,10 +1150,9 @@
           <a:lstStyle/>
           <a:p>
             <a:r>
-              <a:rPr lang="zh-TW" altLang="en-US" smtClean="0"/>
+              <a:rPr lang="zh-TW" altLang="en-US"/>
               <a:t>按一下以編輯母片標題樣式</a:t>
             </a:r>
-            <a:endParaRPr lang="zh-TW" altLang="en-US"/>
           </a:p>
         </p:txBody>
       </p:sp>
@@ -1200,38 +1206,37 @@
           <a:p>
             <a:pPr lvl="0"/>
             <a:r>
-              <a:rPr lang="zh-TW" altLang="en-US" smtClean="0"/>
+              <a:rPr lang="zh-TW" altLang="en-US"/>
               <a:t>按一下以編輯母片文字樣式</a:t>
             </a:r>
           </a:p>
           <a:p>
             <a:pPr lvl="1"/>
             <a:r>
-              <a:rPr lang="zh-TW" altLang="en-US" smtClean="0"/>
+              <a:rPr lang="zh-TW" altLang="en-US"/>
               <a:t>第二層</a:t>
             </a:r>
           </a:p>
           <a:p>
             <a:pPr lvl="2"/>
             <a:r>
-              <a:rPr lang="zh-TW" altLang="en-US" smtClean="0"/>
+              <a:rPr lang="zh-TW" altLang="en-US"/>
               <a:t>第三層</a:t>
             </a:r>
           </a:p>
           <a:p>
             <a:pPr lvl="3"/>
             <a:r>
-              <a:rPr lang="zh-TW" altLang="en-US" smtClean="0"/>
+              <a:rPr lang="zh-TW" altLang="en-US"/>
               <a:t>第四層</a:t>
             </a:r>
           </a:p>
           <a:p>
             <a:pPr lvl="4"/>
             <a:r>
-              <a:rPr lang="zh-TW" altLang="en-US" smtClean="0"/>
+              <a:rPr lang="zh-TW" altLang="en-US"/>
               <a:t>第五層</a:t>
             </a:r>
-            <a:endParaRPr lang="zh-TW" altLang="en-US"/>
           </a:p>
         </p:txBody>
       </p:sp>
@@ -1285,38 +1290,37 @@
           <a:p>
             <a:pPr lvl="0"/>
             <a:r>
-              <a:rPr lang="zh-TW" altLang="en-US" smtClean="0"/>
+              <a:rPr lang="zh-TW" altLang="en-US"/>
               <a:t>按一下以編輯母片文字樣式</a:t>
             </a:r>
           </a:p>
           <a:p>
             <a:pPr lvl="1"/>
             <a:r>
-              <a:rPr lang="zh-TW" altLang="en-US" smtClean="0"/>
+              <a:rPr lang="zh-TW" altLang="en-US"/>
               <a:t>第二層</a:t>
             </a:r>
           </a:p>
           <a:p>
             <a:pPr lvl="2"/>
             <a:r>
-              <a:rPr lang="zh-TW" altLang="en-US" smtClean="0"/>
+              <a:rPr lang="zh-TW" altLang="en-US"/>
               <a:t>第三層</a:t>
             </a:r>
           </a:p>
           <a:p>
             <a:pPr lvl="3"/>
             <a:r>
-              <a:rPr lang="zh-TW" altLang="en-US" smtClean="0"/>
+              <a:rPr lang="zh-TW" altLang="en-US"/>
               <a:t>第四層</a:t>
             </a:r>
           </a:p>
           <a:p>
             <a:pPr lvl="4"/>
             <a:r>
-              <a:rPr lang="zh-TW" altLang="en-US" smtClean="0"/>
+              <a:rPr lang="zh-TW" altLang="en-US"/>
               <a:t>第五層</a:t>
             </a:r>
-            <a:endParaRPr lang="zh-TW" altLang="en-US"/>
           </a:p>
         </p:txBody>
       </p:sp>
@@ -1338,7 +1342,7 @@
             <a:fld id="{93ECE03C-A371-4485-BF1E-27D7131881BB}" type="datetimeFigureOut">
               <a:rPr lang="zh-TW" altLang="en-US" smtClean="0"/>
               <a:pPr/>
-              <a:t>2022/11/12</a:t>
+              <a:t>2024/9/6</a:t>
             </a:fld>
             <a:endParaRPr lang="zh-TW" altLang="en-US"/>
           </a:p>
@@ -1432,10 +1436,9 @@
           </a:lstStyle>
           <a:p>
             <a:r>
-              <a:rPr lang="zh-TW" altLang="en-US" smtClean="0"/>
+              <a:rPr lang="zh-TW" altLang="en-US"/>
               <a:t>按一下以編輯母片標題樣式</a:t>
             </a:r>
-            <a:endParaRPr lang="zh-TW" altLang="en-US"/>
           </a:p>
         </p:txBody>
       </p:sp>
@@ -1498,7 +1501,7 @@
           <a:p>
             <a:pPr lvl="0"/>
             <a:r>
-              <a:rPr lang="zh-TW" altLang="en-US" smtClean="0"/>
+              <a:rPr lang="zh-TW" altLang="en-US"/>
               <a:t>按一下以編輯母片文字樣式</a:t>
             </a:r>
           </a:p>
@@ -1554,38 +1557,37 @@
           <a:p>
             <a:pPr lvl="0"/>
             <a:r>
-              <a:rPr lang="zh-TW" altLang="en-US" smtClean="0"/>
+              <a:rPr lang="zh-TW" altLang="en-US"/>
               <a:t>按一下以編輯母片文字樣式</a:t>
             </a:r>
           </a:p>
           <a:p>
             <a:pPr lvl="1"/>
             <a:r>
-              <a:rPr lang="zh-TW" altLang="en-US" smtClean="0"/>
+              <a:rPr lang="zh-TW" altLang="en-US"/>
               <a:t>第二層</a:t>
             </a:r>
           </a:p>
           <a:p>
             <a:pPr lvl="2"/>
             <a:r>
-              <a:rPr lang="zh-TW" altLang="en-US" smtClean="0"/>
+              <a:rPr lang="zh-TW" altLang="en-US"/>
               <a:t>第三層</a:t>
             </a:r>
           </a:p>
           <a:p>
             <a:pPr lvl="3"/>
             <a:r>
-              <a:rPr lang="zh-TW" altLang="en-US" smtClean="0"/>
+              <a:rPr lang="zh-TW" altLang="en-US"/>
               <a:t>第四層</a:t>
             </a:r>
           </a:p>
           <a:p>
             <a:pPr lvl="4"/>
             <a:r>
-              <a:rPr lang="zh-TW" altLang="en-US" smtClean="0"/>
+              <a:rPr lang="zh-TW" altLang="en-US"/>
               <a:t>第五層</a:t>
             </a:r>
-            <a:endParaRPr lang="zh-TW" altLang="en-US"/>
           </a:p>
         </p:txBody>
       </p:sp>
@@ -1648,7 +1650,7 @@
           <a:p>
             <a:pPr lvl="0"/>
             <a:r>
-              <a:rPr lang="zh-TW" altLang="en-US" smtClean="0"/>
+              <a:rPr lang="zh-TW" altLang="en-US"/>
               <a:t>按一下以編輯母片文字樣式</a:t>
             </a:r>
           </a:p>
@@ -1704,38 +1706,37 @@
           <a:p>
             <a:pPr lvl="0"/>
             <a:r>
-              <a:rPr lang="zh-TW" altLang="en-US" smtClean="0"/>
+              <a:rPr lang="zh-TW" altLang="en-US"/>
               <a:t>按一下以編輯母片文字樣式</a:t>
             </a:r>
           </a:p>
           <a:p>
             <a:pPr lvl="1"/>
             <a:r>
-              <a:rPr lang="zh-TW" altLang="en-US" smtClean="0"/>
+              <a:rPr lang="zh-TW" altLang="en-US"/>
               <a:t>第二層</a:t>
             </a:r>
           </a:p>
           <a:p>
             <a:pPr lvl="2"/>
             <a:r>
-              <a:rPr lang="zh-TW" altLang="en-US" smtClean="0"/>
+              <a:rPr lang="zh-TW" altLang="en-US"/>
               <a:t>第三層</a:t>
             </a:r>
           </a:p>
           <a:p>
             <a:pPr lvl="3"/>
             <a:r>
-              <a:rPr lang="zh-TW" altLang="en-US" smtClean="0"/>
+              <a:rPr lang="zh-TW" altLang="en-US"/>
               <a:t>第四層</a:t>
             </a:r>
           </a:p>
           <a:p>
             <a:pPr lvl="4"/>
             <a:r>
-              <a:rPr lang="zh-TW" altLang="en-US" smtClean="0"/>
+              <a:rPr lang="zh-TW" altLang="en-US"/>
               <a:t>第五層</a:t>
             </a:r>
-            <a:endParaRPr lang="zh-TW" altLang="en-US"/>
           </a:p>
         </p:txBody>
       </p:sp>
@@ -1757,7 +1758,7 @@
             <a:fld id="{93ECE03C-A371-4485-BF1E-27D7131881BB}" type="datetimeFigureOut">
               <a:rPr lang="zh-TW" altLang="en-US" smtClean="0"/>
               <a:pPr/>
-              <a:t>2022/11/12</a:t>
+              <a:t>2024/9/6</a:t>
             </a:fld>
             <a:endParaRPr lang="zh-TW" altLang="en-US"/>
           </a:p>
@@ -1847,10 +1848,9 @@
           <a:lstStyle/>
           <a:p>
             <a:r>
-              <a:rPr lang="zh-TW" altLang="en-US" smtClean="0"/>
+              <a:rPr lang="zh-TW" altLang="en-US"/>
               <a:t>按一下以編輯母片標題樣式</a:t>
             </a:r>
-            <a:endParaRPr lang="zh-TW" altLang="en-US"/>
           </a:p>
         </p:txBody>
       </p:sp>
@@ -1872,7 +1872,7 @@
             <a:fld id="{93ECE03C-A371-4485-BF1E-27D7131881BB}" type="datetimeFigureOut">
               <a:rPr lang="zh-TW" altLang="en-US" smtClean="0"/>
               <a:pPr/>
-              <a:t>2022/11/12</a:t>
+              <a:t>2024/9/6</a:t>
             </a:fld>
             <a:endParaRPr lang="zh-TW" altLang="en-US"/>
           </a:p>
@@ -1964,7 +1964,7 @@
             <a:fld id="{93ECE03C-A371-4485-BF1E-27D7131881BB}" type="datetimeFigureOut">
               <a:rPr lang="zh-TW" altLang="en-US" smtClean="0"/>
               <a:pPr/>
-              <a:t>2022/11/12</a:t>
+              <a:t>2024/9/6</a:t>
             </a:fld>
             <a:endParaRPr lang="zh-TW" altLang="en-US"/>
           </a:p>
@@ -2063,10 +2063,9 @@
           </a:lstStyle>
           <a:p>
             <a:r>
-              <a:rPr lang="zh-TW" altLang="en-US" smtClean="0"/>
+              <a:rPr lang="zh-TW" altLang="en-US"/>
               <a:t>按一下以編輯母片標題樣式</a:t>
             </a:r>
-            <a:endParaRPr lang="zh-TW" altLang="en-US"/>
           </a:p>
         </p:txBody>
       </p:sp>
@@ -2120,38 +2119,37 @@
           <a:p>
             <a:pPr lvl="0"/>
             <a:r>
-              <a:rPr lang="zh-TW" altLang="en-US" smtClean="0"/>
+              <a:rPr lang="zh-TW" altLang="en-US"/>
               <a:t>按一下以編輯母片文字樣式</a:t>
             </a:r>
           </a:p>
           <a:p>
             <a:pPr lvl="1"/>
             <a:r>
-              <a:rPr lang="zh-TW" altLang="en-US" smtClean="0"/>
+              <a:rPr lang="zh-TW" altLang="en-US"/>
               <a:t>第二層</a:t>
             </a:r>
           </a:p>
           <a:p>
             <a:pPr lvl="2"/>
             <a:r>
-              <a:rPr lang="zh-TW" altLang="en-US" smtClean="0"/>
+              <a:rPr lang="zh-TW" altLang="en-US"/>
               <a:t>第三層</a:t>
             </a:r>
           </a:p>
           <a:p>
             <a:pPr lvl="3"/>
             <a:r>
-              <a:rPr lang="zh-TW" altLang="en-US" smtClean="0"/>
+              <a:rPr lang="zh-TW" altLang="en-US"/>
               <a:t>第四層</a:t>
             </a:r>
           </a:p>
           <a:p>
             <a:pPr lvl="4"/>
             <a:r>
-              <a:rPr lang="zh-TW" altLang="en-US" smtClean="0"/>
+              <a:rPr lang="zh-TW" altLang="en-US"/>
               <a:t>第五層</a:t>
             </a:r>
-            <a:endParaRPr lang="zh-TW" altLang="en-US"/>
           </a:p>
         </p:txBody>
       </p:sp>
@@ -2214,7 +2212,7 @@
           <a:p>
             <a:pPr lvl="0"/>
             <a:r>
-              <a:rPr lang="zh-TW" altLang="en-US" smtClean="0"/>
+              <a:rPr lang="zh-TW" altLang="en-US"/>
               <a:t>按一下以編輯母片文字樣式</a:t>
             </a:r>
           </a:p>
@@ -2238,7 +2236,7 @@
             <a:fld id="{93ECE03C-A371-4485-BF1E-27D7131881BB}" type="datetimeFigureOut">
               <a:rPr lang="zh-TW" altLang="en-US" smtClean="0"/>
               <a:pPr/>
-              <a:t>2022/11/12</a:t>
+              <a:t>2024/9/6</a:t>
             </a:fld>
             <a:endParaRPr lang="zh-TW" altLang="en-US"/>
           </a:p>
@@ -2337,10 +2335,9 @@
           </a:lstStyle>
           <a:p>
             <a:r>
-              <a:rPr lang="zh-TW" altLang="en-US" smtClean="0"/>
+              <a:rPr lang="zh-TW" altLang="en-US"/>
               <a:t>按一下以編輯母片標題樣式</a:t>
             </a:r>
-            <a:endParaRPr lang="zh-TW" altLang="en-US"/>
           </a:p>
         </p:txBody>
       </p:sp>
@@ -2402,10 +2399,9 @@
           </a:lstStyle>
           <a:p>
             <a:r>
-              <a:rPr lang="zh-TW" altLang="en-US" smtClean="0"/>
+              <a:rPr lang="zh-TW" altLang="en-US"/>
               <a:t>按一下圖示以新增圖片</a:t>
             </a:r>
-            <a:endParaRPr lang="zh-TW" altLang="en-US"/>
           </a:p>
         </p:txBody>
       </p:sp>
@@ -2468,7 +2464,7 @@
           <a:p>
             <a:pPr lvl="0"/>
             <a:r>
-              <a:rPr lang="zh-TW" altLang="en-US" smtClean="0"/>
+              <a:rPr lang="zh-TW" altLang="en-US"/>
               <a:t>按一下以編輯母片文字樣式</a:t>
             </a:r>
           </a:p>
@@ -2492,7 +2488,7 @@
             <a:fld id="{93ECE03C-A371-4485-BF1E-27D7131881BB}" type="datetimeFigureOut">
               <a:rPr lang="zh-TW" altLang="en-US" smtClean="0"/>
               <a:pPr/>
-              <a:t>2022/11/12</a:t>
+              <a:t>2024/9/6</a:t>
             </a:fld>
             <a:endParaRPr lang="zh-TW" altLang="en-US"/>
           </a:p>
@@ -2602,10 +2598,9 @@
           <a:lstStyle/>
           <a:p>
             <a:r>
-              <a:rPr lang="zh-TW" altLang="en-US" smtClean="0"/>
+              <a:rPr lang="zh-TW" altLang="en-US"/>
               <a:t>按一下以編輯母片標題樣式</a:t>
             </a:r>
-            <a:endParaRPr lang="zh-TW" altLang="en-US"/>
           </a:p>
         </p:txBody>
       </p:sp>
@@ -2636,38 +2631,37 @@
           <a:p>
             <a:pPr lvl="0"/>
             <a:r>
-              <a:rPr lang="zh-TW" altLang="en-US" smtClean="0"/>
+              <a:rPr lang="zh-TW" altLang="en-US"/>
               <a:t>按一下以編輯母片文字樣式</a:t>
             </a:r>
           </a:p>
           <a:p>
             <a:pPr lvl="1"/>
             <a:r>
-              <a:rPr lang="zh-TW" altLang="en-US" smtClean="0"/>
+              <a:rPr lang="zh-TW" altLang="en-US"/>
               <a:t>第二層</a:t>
             </a:r>
           </a:p>
           <a:p>
             <a:pPr lvl="2"/>
             <a:r>
-              <a:rPr lang="zh-TW" altLang="en-US" smtClean="0"/>
+              <a:rPr lang="zh-TW" altLang="en-US"/>
               <a:t>第三層</a:t>
             </a:r>
           </a:p>
           <a:p>
             <a:pPr lvl="3"/>
             <a:r>
-              <a:rPr lang="zh-TW" altLang="en-US" smtClean="0"/>
+              <a:rPr lang="zh-TW" altLang="en-US"/>
               <a:t>第四層</a:t>
             </a:r>
           </a:p>
           <a:p>
             <a:pPr lvl="4"/>
             <a:r>
-              <a:rPr lang="zh-TW" altLang="en-US" smtClean="0"/>
+              <a:rPr lang="zh-TW" altLang="en-US"/>
               <a:t>第五層</a:t>
             </a:r>
-            <a:endParaRPr lang="zh-TW" altLang="en-US"/>
           </a:p>
         </p:txBody>
       </p:sp>
@@ -2707,7 +2701,7 @@
             <a:fld id="{93ECE03C-A371-4485-BF1E-27D7131881BB}" type="datetimeFigureOut">
               <a:rPr lang="zh-TW" altLang="en-US" smtClean="0"/>
               <a:pPr/>
-              <a:t>2022/11/12</a:t>
+              <a:t>2024/9/6</a:t>
             </a:fld>
             <a:endParaRPr lang="zh-TW" altLang="en-US"/>
           </a:p>
@@ -3101,7 +3095,7 @@
           <a:lstStyle/>
           <a:p>
             <a:r>
-              <a:rPr lang="zh-CN" altLang="en-US" sz="5400" b="1" i="1" dirty="0" smtClean="0">
+              <a:rPr lang="zh-CN" altLang="en-US" sz="5400" b="1" i="1" dirty="0">
                 <a:solidFill>
                   <a:srgbClr val="660033"/>
                 </a:solidFill>
@@ -3118,7 +3112,7 @@
               <a:t>詩篇</a:t>
             </a:r>
             <a:r>
-              <a:rPr lang="en-US" altLang="zh-CN" sz="5400" b="1" i="1" dirty="0" smtClean="0">
+              <a:rPr lang="en-US" altLang="zh-CN" sz="5400" b="1" i="1" dirty="0">
                 <a:solidFill>
                   <a:srgbClr val="660033"/>
                 </a:solidFill>
@@ -3135,7 +3129,7 @@
               <a:t>23</a:t>
             </a:r>
             <a:r>
-              <a:rPr lang="zh-CN" altLang="en-US" sz="5400" b="1" i="1" dirty="0" smtClean="0">
+              <a:rPr lang="zh-CN" altLang="en-US" sz="5400" b="1" i="1" dirty="0">
                 <a:solidFill>
                   <a:srgbClr val="660033"/>
                 </a:solidFill>
@@ -3219,7 +3213,7 @@
               <a:buNone/>
             </a:pPr>
             <a:r>
-              <a:rPr lang="zh-CN" altLang="en-US" sz="4800" b="1" dirty="0" smtClean="0">
+              <a:rPr lang="zh-CN" altLang="en-US" sz="4800" b="1" dirty="0">
                 <a:solidFill>
                   <a:srgbClr val="660033"/>
                 </a:solidFill>
@@ -3228,7 +3222,7 @@
               </a:rPr>
               <a:t>我一生一世</a:t>
             </a:r>
-            <a:endParaRPr lang="en-US" altLang="zh-CN" sz="4800" b="1" dirty="0" smtClean="0">
+            <a:endParaRPr lang="en-US" altLang="zh-CN" sz="4800" b="1" dirty="0">
               <a:solidFill>
                 <a:srgbClr val="660033"/>
               </a:solidFill>
@@ -3241,7 +3235,7 @@
               <a:buNone/>
             </a:pPr>
             <a:r>
-              <a:rPr lang="zh-CN" altLang="en-US" sz="4800" b="1" dirty="0" smtClean="0">
+              <a:rPr lang="zh-CN" altLang="en-US" sz="4800" b="1" dirty="0">
                 <a:solidFill>
                   <a:srgbClr val="660033"/>
                 </a:solidFill>
@@ -3250,7 +3244,7 @@
               </a:rPr>
               <a:t>必有恩惠慈愛隨著我</a:t>
             </a:r>
-            <a:endParaRPr lang="en-US" altLang="zh-CN" sz="4800" b="1" dirty="0" smtClean="0">
+            <a:endParaRPr lang="en-US" altLang="zh-CN" sz="4800" b="1" dirty="0">
               <a:solidFill>
                 <a:srgbClr val="660033"/>
               </a:solidFill>
@@ -3284,7 +3278,7 @@
           <a:p>
             <a:pPr algn="ctr"/>
             <a:r>
-              <a:rPr lang="en-US" sz="2800" b="1" dirty="0" smtClean="0">
+              <a:rPr lang="en-US" sz="2800" b="1" dirty="0">
                 <a:solidFill>
                   <a:srgbClr val="660033"/>
                 </a:solidFill>
@@ -3294,34 +3288,24 @@
               <a:t>( </a:t>
             </a:r>
             <a:r>
-              <a:rPr lang="zh-CN" altLang="en-US" sz="2800" b="1" dirty="0" smtClean="0">
+              <a:rPr lang="zh-CN" altLang="en-US" sz="2800" b="1" dirty="0">
                 <a:solidFill>
                   <a:srgbClr val="660033"/>
                 </a:solidFill>
                 <a:latin typeface="Microsoft JhengHei" panose="020B0604030504040204" pitchFamily="34" charset="-120"/>
                 <a:ea typeface="Microsoft JhengHei" panose="020B0604030504040204" pitchFamily="34" charset="-120"/>
               </a:rPr>
-              <a:t>副</a:t>
-            </a:r>
-            <a:r>
-              <a:rPr lang="en-US" sz="2800" b="1" dirty="0" smtClean="0">
+              <a:t>副歌</a:t>
+            </a:r>
+            <a:r>
+              <a:rPr lang="en-US" sz="2800" b="1" dirty="0">
                 <a:solidFill>
                   <a:srgbClr val="660033"/>
                 </a:solidFill>
                 <a:latin typeface="Microsoft JhengHei" panose="020B0604030504040204" pitchFamily="34" charset="-120"/>
                 <a:ea typeface="Microsoft JhengHei" panose="020B0604030504040204" pitchFamily="34" charset="-120"/>
               </a:rPr>
-              <a:t> </a:t>
-            </a:r>
-            <a:r>
-              <a:rPr lang="en-US" sz="2800" b="1" dirty="0" smtClean="0">
-                <a:solidFill>
-                  <a:srgbClr val="660033"/>
-                </a:solidFill>
-                <a:latin typeface="Microsoft JhengHei" panose="020B0604030504040204" pitchFamily="34" charset="-120"/>
-                <a:ea typeface="Microsoft JhengHei" panose="020B0604030504040204" pitchFamily="34" charset="-120"/>
-              </a:rPr>
-              <a:t>)</a:t>
+              <a:t> )</a:t>
             </a:r>
             <a:endParaRPr lang="vi-VN" sz="2800" b="1" dirty="0">
               <a:solidFill>
@@ -3383,7 +3367,7 @@
               <a:buNone/>
             </a:pPr>
             <a:r>
-              <a:rPr lang="zh-CN" altLang="en-US" sz="4800" b="1" dirty="0" smtClean="0">
+              <a:rPr lang="zh-CN" altLang="en-US" sz="4800" b="1" dirty="0">
                 <a:solidFill>
                   <a:srgbClr val="660033"/>
                 </a:solidFill>
@@ -3392,7 +3376,7 @@
               </a:rPr>
               <a:t>我且要住在耶和華的殿中</a:t>
             </a:r>
-            <a:endParaRPr lang="en-US" altLang="zh-CN" sz="4800" b="1" dirty="0" smtClean="0">
+            <a:endParaRPr lang="en-US" altLang="zh-CN" sz="4800" b="1" dirty="0">
               <a:solidFill>
                 <a:srgbClr val="660033"/>
               </a:solidFill>
@@ -3405,7 +3389,7 @@
               <a:buNone/>
             </a:pPr>
             <a:r>
-              <a:rPr lang="zh-CN" altLang="en-US" sz="4800" b="1" dirty="0" smtClean="0">
+              <a:rPr lang="zh-CN" altLang="en-US" sz="4800" b="1" dirty="0">
                 <a:solidFill>
                   <a:srgbClr val="660033"/>
                 </a:solidFill>
@@ -3414,7 +3398,7 @@
               </a:rPr>
               <a:t>直到永永遠遠</a:t>
             </a:r>
-            <a:endParaRPr lang="zh-TW" altLang="en-US" sz="4800" b="1" dirty="0" smtClean="0">
+            <a:endParaRPr lang="zh-TW" altLang="en-US" sz="4800" b="1" dirty="0">
               <a:solidFill>
                 <a:srgbClr val="660033"/>
               </a:solidFill>
@@ -3448,7 +3432,7 @@
           <a:p>
             <a:pPr algn="ctr"/>
             <a:r>
-              <a:rPr lang="en-US" sz="2800" b="1" dirty="0" smtClean="0">
+              <a:rPr lang="en-US" sz="2800" b="1" dirty="0">
                 <a:solidFill>
                   <a:srgbClr val="660033"/>
                 </a:solidFill>
@@ -3458,34 +3442,24 @@
               <a:t>( </a:t>
             </a:r>
             <a:r>
-              <a:rPr lang="zh-CN" altLang="en-US" sz="2800" b="1" dirty="0" smtClean="0">
+              <a:rPr lang="zh-CN" altLang="en-US" sz="2800" b="1" dirty="0">
                 <a:solidFill>
                   <a:srgbClr val="660033"/>
                 </a:solidFill>
                 <a:latin typeface="Microsoft JhengHei" panose="020B0604030504040204" pitchFamily="34" charset="-120"/>
                 <a:ea typeface="Microsoft JhengHei" panose="020B0604030504040204" pitchFamily="34" charset="-120"/>
               </a:rPr>
-              <a:t>副</a:t>
-            </a:r>
-            <a:r>
-              <a:rPr lang="en-US" sz="2800" b="1" dirty="0" smtClean="0">
+              <a:t>副歌</a:t>
+            </a:r>
+            <a:r>
+              <a:rPr lang="en-US" sz="2800" b="1" dirty="0">
                 <a:solidFill>
                   <a:srgbClr val="660033"/>
                 </a:solidFill>
                 <a:latin typeface="Microsoft JhengHei" panose="020B0604030504040204" pitchFamily="34" charset="-120"/>
                 <a:ea typeface="Microsoft JhengHei" panose="020B0604030504040204" pitchFamily="34" charset="-120"/>
               </a:rPr>
-              <a:t> </a:t>
-            </a:r>
-            <a:r>
-              <a:rPr lang="en-US" sz="2800" b="1" dirty="0" smtClean="0">
-                <a:solidFill>
-                  <a:srgbClr val="660033"/>
-                </a:solidFill>
-                <a:latin typeface="Microsoft JhengHei" panose="020B0604030504040204" pitchFamily="34" charset="-120"/>
-                <a:ea typeface="Microsoft JhengHei" panose="020B0604030504040204" pitchFamily="34" charset="-120"/>
-              </a:rPr>
-              <a:t>)</a:t>
+              <a:t> )</a:t>
             </a:r>
             <a:endParaRPr lang="vi-VN" sz="2800" b="1" dirty="0">
               <a:solidFill>
@@ -3547,7 +3521,7 @@
               <a:buNone/>
             </a:pPr>
             <a:r>
-              <a:rPr lang="zh-CN" altLang="en-US" sz="4800" b="1" dirty="0" smtClean="0">
+              <a:rPr lang="zh-CN" altLang="en-US" sz="4800" b="1" dirty="0">
                 <a:solidFill>
                   <a:srgbClr val="660033"/>
                 </a:solidFill>
@@ -3556,7 +3530,7 @@
               </a:rPr>
               <a:t>耶和華是我的牧者</a:t>
             </a:r>
-            <a:endParaRPr lang="en-US" altLang="zh-CN" sz="4800" b="1" dirty="0" smtClean="0">
+            <a:endParaRPr lang="en-US" altLang="zh-CN" sz="4800" b="1" dirty="0">
               <a:solidFill>
                 <a:srgbClr val="660033"/>
               </a:solidFill>
@@ -3569,7 +3543,7 @@
               <a:buNone/>
             </a:pPr>
             <a:r>
-              <a:rPr lang="zh-CN" altLang="en-US" sz="4800" b="1" dirty="0" smtClean="0">
+              <a:rPr lang="zh-CN" altLang="en-US" sz="4800" b="1" dirty="0">
                 <a:solidFill>
                   <a:srgbClr val="660033"/>
                 </a:solidFill>
@@ -3578,7 +3552,7 @@
               </a:rPr>
               <a:t>我必不至缺乏</a:t>
             </a:r>
-            <a:endParaRPr lang="en-US" altLang="zh-CN" sz="4800" b="1" dirty="0" smtClean="0">
+            <a:endParaRPr lang="en-US" altLang="zh-CN" sz="4800" b="1" dirty="0">
               <a:solidFill>
                 <a:srgbClr val="660033"/>
               </a:solidFill>
@@ -3612,7 +3586,7 @@
           <a:p>
             <a:pPr algn="ctr"/>
             <a:r>
-              <a:rPr lang="en-US" sz="2800" b="1" dirty="0" smtClean="0">
+              <a:rPr lang="en-US" sz="2800" b="1" dirty="0">
                 <a:solidFill>
                   <a:srgbClr val="660033"/>
                 </a:solidFill>
@@ -3622,17 +3596,17 @@
               <a:t>( </a:t>
             </a:r>
             <a:r>
-              <a:rPr lang="zh-CN" altLang="en-US" sz="2800" b="1" dirty="0" smtClean="0">
+              <a:rPr lang="zh-CN" altLang="en-US" sz="2800" b="1" dirty="0">
                 <a:solidFill>
                   <a:srgbClr val="660033"/>
                 </a:solidFill>
                 <a:latin typeface="Microsoft JhengHei" panose="020B0604030504040204" pitchFamily="34" charset="-120"/>
                 <a:ea typeface="Microsoft JhengHei" panose="020B0604030504040204" pitchFamily="34" charset="-120"/>
               </a:rPr>
-              <a:t>正</a:t>
-            </a:r>
-            <a:r>
-              <a:rPr lang="en-US" sz="2800" b="1" dirty="0" smtClean="0">
+              <a:t>正歌</a:t>
+            </a:r>
+            <a:r>
+              <a:rPr lang="en-US" sz="2800" b="1" dirty="0">
                 <a:solidFill>
                   <a:srgbClr val="660033"/>
                 </a:solidFill>
@@ -3701,7 +3675,7 @@
               <a:buNone/>
             </a:pPr>
             <a:r>
-              <a:rPr lang="zh-CN" altLang="en-US" sz="4800" b="1" dirty="0" smtClean="0">
+              <a:rPr lang="zh-CN" altLang="en-US" sz="4800" b="1" dirty="0">
                 <a:solidFill>
                   <a:srgbClr val="660033"/>
                 </a:solidFill>
@@ -3710,7 +3684,7 @@
               </a:rPr>
               <a:t>祂使我躺臥青草地上</a:t>
             </a:r>
-            <a:endParaRPr lang="en-US" altLang="zh-CN" sz="4800" b="1" dirty="0" smtClean="0">
+            <a:endParaRPr lang="en-US" altLang="zh-CN" sz="4800" b="1" dirty="0">
               <a:solidFill>
                 <a:srgbClr val="660033"/>
               </a:solidFill>
@@ -3723,7 +3697,7 @@
               <a:buNone/>
             </a:pPr>
             <a:r>
-              <a:rPr lang="zh-CN" altLang="en-US" sz="4800" b="1" dirty="0" smtClean="0">
+              <a:rPr lang="zh-CN" altLang="en-US" sz="4800" b="1" dirty="0">
                 <a:solidFill>
                   <a:srgbClr val="660033"/>
                 </a:solidFill>
@@ -3732,7 +3706,7 @@
               </a:rPr>
               <a:t>領我在可安歇的水邊</a:t>
             </a:r>
-            <a:endParaRPr lang="zh-TW" altLang="en-US" sz="4800" b="1" dirty="0" smtClean="0">
+            <a:endParaRPr lang="zh-TW" altLang="en-US" sz="4800" b="1" dirty="0">
               <a:solidFill>
                 <a:srgbClr val="660033"/>
               </a:solidFill>
@@ -3766,7 +3740,7 @@
           <a:p>
             <a:pPr algn="ctr"/>
             <a:r>
-              <a:rPr lang="en-US" sz="2800" b="1" dirty="0" smtClean="0">
+              <a:rPr lang="en-US" sz="2800" b="1" dirty="0">
                 <a:solidFill>
                   <a:srgbClr val="660033"/>
                 </a:solidFill>
@@ -3776,17 +3750,17 @@
               <a:t>( </a:t>
             </a:r>
             <a:r>
-              <a:rPr lang="zh-CN" altLang="en-US" sz="2800" b="1" dirty="0" smtClean="0">
+              <a:rPr lang="zh-CN" altLang="en-US" sz="2800" b="1" dirty="0">
                 <a:solidFill>
                   <a:srgbClr val="660033"/>
                 </a:solidFill>
                 <a:latin typeface="Microsoft JhengHei" panose="020B0604030504040204" pitchFamily="34" charset="-120"/>
                 <a:ea typeface="Microsoft JhengHei" panose="020B0604030504040204" pitchFamily="34" charset="-120"/>
               </a:rPr>
-              <a:t>正</a:t>
-            </a:r>
-            <a:r>
-              <a:rPr lang="en-US" sz="2800" b="1" dirty="0" smtClean="0">
+              <a:t>正歌</a:t>
+            </a:r>
+            <a:r>
+              <a:rPr lang="en-US" sz="2800" b="1" dirty="0">
                 <a:solidFill>
                   <a:srgbClr val="660033"/>
                 </a:solidFill>
@@ -3855,7 +3829,7 @@
               <a:buNone/>
             </a:pPr>
             <a:r>
-              <a:rPr lang="zh-CN" altLang="en-US" sz="4800" b="1" dirty="0" smtClean="0">
+              <a:rPr lang="zh-CN" altLang="en-US" sz="4800" b="1" dirty="0">
                 <a:solidFill>
                   <a:srgbClr val="660033"/>
                 </a:solidFill>
@@ -3864,7 +3838,7 @@
               </a:rPr>
               <a:t>祂使我的靈魂甦醒</a:t>
             </a:r>
-            <a:endParaRPr lang="en-US" altLang="zh-CN" sz="4800" b="1" dirty="0" smtClean="0">
+            <a:endParaRPr lang="en-US" altLang="zh-CN" sz="4800" b="1" dirty="0">
               <a:solidFill>
                 <a:srgbClr val="660033"/>
               </a:solidFill>
@@ -3877,7 +3851,7 @@
               <a:buNone/>
             </a:pPr>
             <a:r>
-              <a:rPr lang="zh-CN" altLang="en-US" sz="4800" b="1" dirty="0" smtClean="0">
+              <a:rPr lang="zh-CN" altLang="en-US" sz="4800" b="1" dirty="0">
                 <a:solidFill>
                   <a:srgbClr val="660033"/>
                 </a:solidFill>
@@ -3886,7 +3860,7 @@
               </a:rPr>
               <a:t>使我靈魂甦醒</a:t>
             </a:r>
-            <a:endParaRPr lang="en-US" altLang="zh-CN" sz="4800" b="1" dirty="0" smtClean="0">
+            <a:endParaRPr lang="en-US" altLang="zh-CN" sz="4800" b="1" dirty="0">
               <a:solidFill>
                 <a:srgbClr val="660033"/>
               </a:solidFill>
@@ -3920,7 +3894,7 @@
           <a:p>
             <a:pPr algn="ctr"/>
             <a:r>
-              <a:rPr lang="en-US" sz="2800" b="1" dirty="0" smtClean="0">
+              <a:rPr lang="en-US" sz="2800" b="1" dirty="0">
                 <a:solidFill>
                   <a:srgbClr val="660033"/>
                 </a:solidFill>
@@ -3930,17 +3904,17 @@
               <a:t>( </a:t>
             </a:r>
             <a:r>
-              <a:rPr lang="zh-CN" altLang="en-US" sz="2800" b="1" dirty="0" smtClean="0">
+              <a:rPr lang="zh-CN" altLang="en-US" sz="2800" b="1" dirty="0">
                 <a:solidFill>
                   <a:srgbClr val="660033"/>
                 </a:solidFill>
                 <a:latin typeface="Microsoft JhengHei" panose="020B0604030504040204" pitchFamily="34" charset="-120"/>
                 <a:ea typeface="Microsoft JhengHei" panose="020B0604030504040204" pitchFamily="34" charset="-120"/>
               </a:rPr>
-              <a:t>正</a:t>
-            </a:r>
-            <a:r>
-              <a:rPr lang="en-US" sz="2800" b="1" dirty="0" smtClean="0">
+              <a:t>正歌</a:t>
+            </a:r>
+            <a:r>
+              <a:rPr lang="en-US" sz="2800" b="1" dirty="0">
                 <a:solidFill>
                   <a:srgbClr val="660033"/>
                 </a:solidFill>
@@ -4009,7 +3983,7 @@
               <a:buNone/>
             </a:pPr>
             <a:r>
-              <a:rPr lang="zh-CN" altLang="en-US" sz="4800" b="1" dirty="0" smtClean="0">
+              <a:rPr lang="zh-CN" altLang="en-US" sz="4800" b="1" dirty="0">
                 <a:solidFill>
                   <a:srgbClr val="660033"/>
                 </a:solidFill>
@@ -4018,7 +3992,7 @@
               </a:rPr>
               <a:t>為自己的名引導我走義路</a:t>
             </a:r>
-            <a:endParaRPr lang="en-US" altLang="zh-CN" sz="4800" b="1" dirty="0" smtClean="0">
+            <a:endParaRPr lang="en-US" altLang="zh-CN" sz="4800" b="1" dirty="0">
               <a:solidFill>
                 <a:srgbClr val="660033"/>
               </a:solidFill>
@@ -4031,7 +4005,7 @@
               <a:buNone/>
             </a:pPr>
             <a:r>
-              <a:rPr lang="zh-CN" altLang="en-US" sz="4800" b="1" dirty="0" smtClean="0">
+              <a:rPr lang="zh-CN" altLang="en-US" sz="4800" b="1" dirty="0">
                 <a:solidFill>
                   <a:srgbClr val="660033"/>
                 </a:solidFill>
@@ -4040,7 +4014,7 @@
               </a:rPr>
               <a:t>引導我走義路</a:t>
             </a:r>
-            <a:endParaRPr lang="zh-TW" altLang="en-US" sz="4800" b="1" dirty="0" smtClean="0">
+            <a:endParaRPr lang="zh-TW" altLang="en-US" sz="4800" b="1" dirty="0">
               <a:solidFill>
                 <a:srgbClr val="660033"/>
               </a:solidFill>
@@ -4074,7 +4048,7 @@
           <a:p>
             <a:pPr algn="ctr"/>
             <a:r>
-              <a:rPr lang="en-US" sz="2800" b="1" dirty="0" smtClean="0">
+              <a:rPr lang="en-US" sz="2800" b="1" dirty="0">
                 <a:solidFill>
                   <a:srgbClr val="660033"/>
                 </a:solidFill>
@@ -4084,17 +4058,17 @@
               <a:t>( </a:t>
             </a:r>
             <a:r>
-              <a:rPr lang="zh-CN" altLang="en-US" sz="2800" b="1" dirty="0" smtClean="0">
+              <a:rPr lang="zh-CN" altLang="en-US" sz="2800" b="1" dirty="0">
                 <a:solidFill>
                   <a:srgbClr val="660033"/>
                 </a:solidFill>
                 <a:latin typeface="Microsoft JhengHei" panose="020B0604030504040204" pitchFamily="34" charset="-120"/>
                 <a:ea typeface="Microsoft JhengHei" panose="020B0604030504040204" pitchFamily="34" charset="-120"/>
               </a:rPr>
-              <a:t>正</a:t>
-            </a:r>
-            <a:r>
-              <a:rPr lang="en-US" sz="2800" b="1" dirty="0" smtClean="0">
+              <a:t>正歌</a:t>
+            </a:r>
+            <a:r>
+              <a:rPr lang="en-US" sz="2800" b="1" dirty="0">
                 <a:solidFill>
                   <a:srgbClr val="660033"/>
                 </a:solidFill>
@@ -4163,7 +4137,7 @@
               <a:buNone/>
             </a:pPr>
             <a:r>
-              <a:rPr lang="zh-CN" altLang="en-US" sz="4800" b="1" dirty="0" smtClean="0">
+              <a:rPr lang="zh-CN" altLang="en-US" sz="4800" b="1" dirty="0">
                 <a:solidFill>
                   <a:srgbClr val="660033"/>
                 </a:solidFill>
@@ -4172,7 +4146,7 @@
               </a:rPr>
               <a:t>我雖然行過死蔭幽谷</a:t>
             </a:r>
-            <a:endParaRPr lang="en-US" altLang="zh-CN" sz="4800" b="1" dirty="0" smtClean="0">
+            <a:endParaRPr lang="en-US" altLang="zh-CN" sz="4800" b="1" dirty="0">
               <a:solidFill>
                 <a:srgbClr val="660033"/>
               </a:solidFill>
@@ -4185,7 +4159,7 @@
               <a:buNone/>
             </a:pPr>
             <a:r>
-              <a:rPr lang="zh-CN" altLang="en-US" sz="4800" b="1" dirty="0" smtClean="0">
+              <a:rPr lang="zh-CN" altLang="en-US" sz="4800" b="1" dirty="0">
                 <a:solidFill>
                   <a:srgbClr val="660033"/>
                 </a:solidFill>
@@ -4194,7 +4168,7 @@
               </a:rPr>
               <a:t>也不怕遭害</a:t>
             </a:r>
-            <a:endParaRPr lang="en-US" altLang="zh-CN" sz="4800" b="1" dirty="0" smtClean="0">
+            <a:endParaRPr lang="en-US" altLang="zh-CN" sz="4800" b="1" dirty="0">
               <a:solidFill>
                 <a:srgbClr val="660033"/>
               </a:solidFill>
@@ -4228,7 +4202,7 @@
           <a:p>
             <a:pPr algn="ctr"/>
             <a:r>
-              <a:rPr lang="en-US" sz="2800" b="1" dirty="0" smtClean="0">
+              <a:rPr lang="en-US" sz="2800" b="1" dirty="0">
                 <a:solidFill>
                   <a:srgbClr val="660033"/>
                 </a:solidFill>
@@ -4238,17 +4212,17 @@
               <a:t>( </a:t>
             </a:r>
             <a:r>
-              <a:rPr lang="zh-CN" altLang="en-US" sz="2800" b="1" dirty="0" smtClean="0">
+              <a:rPr lang="zh-CN" altLang="en-US" sz="2800" b="1" dirty="0">
                 <a:solidFill>
                   <a:srgbClr val="660033"/>
                 </a:solidFill>
                 <a:latin typeface="Microsoft JhengHei" panose="020B0604030504040204" pitchFamily="34" charset="-120"/>
                 <a:ea typeface="Microsoft JhengHei" panose="020B0604030504040204" pitchFamily="34" charset="-120"/>
               </a:rPr>
-              <a:t>正</a:t>
-            </a:r>
-            <a:r>
-              <a:rPr lang="en-US" sz="2800" b="1" dirty="0" smtClean="0">
+              <a:t>正歌</a:t>
+            </a:r>
+            <a:r>
+              <a:rPr lang="en-US" sz="2800" b="1" dirty="0">
                 <a:solidFill>
                   <a:srgbClr val="660033"/>
                 </a:solidFill>
@@ -4317,46 +4291,16 @@
               <a:buNone/>
             </a:pPr>
             <a:r>
-              <a:rPr lang="zh-CN" altLang="en-US" sz="4800" b="1" dirty="0" smtClean="0">
+              <a:rPr lang="zh-CN" altLang="en-US" sz="4800" b="1" dirty="0">
                 <a:solidFill>
                   <a:srgbClr val="660033"/>
                 </a:solidFill>
                 <a:latin typeface="微軟正黑體" pitchFamily="34" charset="-120"/>
                 <a:ea typeface="微軟正黑體" pitchFamily="34" charset="-120"/>
               </a:rPr>
-              <a:t>因為</a:t>
-            </a:r>
-            <a:r>
-              <a:rPr lang="zh-CN" altLang="en-US" sz="4800" b="1" dirty="0" smtClean="0">
-                <a:solidFill>
-                  <a:srgbClr val="660033"/>
-                </a:solidFill>
-                <a:latin typeface="微軟正黑體" pitchFamily="34" charset="-120"/>
-                <a:ea typeface="微軟正黑體" pitchFamily="34" charset="-120"/>
-              </a:rPr>
-              <a:t>袮</a:t>
-            </a:r>
-            <a:r>
-              <a:rPr lang="zh-CN" altLang="en-US" sz="4800" b="1" dirty="0" smtClean="0">
-                <a:solidFill>
-                  <a:srgbClr val="660033"/>
-                </a:solidFill>
-                <a:latin typeface="微軟正黑體" pitchFamily="34" charset="-120"/>
-                <a:ea typeface="微軟正黑體" pitchFamily="34" charset="-120"/>
-              </a:rPr>
-              <a:t>與</a:t>
-            </a:r>
-            <a:r>
-              <a:rPr lang="zh-CN" altLang="en-US" sz="4800" b="1" dirty="0" smtClean="0">
-                <a:solidFill>
-                  <a:srgbClr val="660033"/>
-                </a:solidFill>
-                <a:latin typeface="微軟正黑體" pitchFamily="34" charset="-120"/>
-                <a:ea typeface="微軟正黑體" pitchFamily="34" charset="-120"/>
-              </a:rPr>
-              <a:t>我同在</a:t>
-            </a:r>
-            <a:endParaRPr lang="en-US" altLang="zh-CN" sz="4800" b="1" dirty="0" smtClean="0">
+              <a:t>因為祢與我同在</a:t>
+            </a:r>
+            <a:endParaRPr lang="en-US" altLang="zh-CN" sz="4800" b="1" dirty="0">
               <a:solidFill>
                 <a:srgbClr val="660033"/>
               </a:solidFill>
@@ -4369,16 +4313,16 @@
               <a:buNone/>
             </a:pPr>
             <a:r>
-              <a:rPr lang="zh-CN" altLang="en-US" sz="4800" b="1" dirty="0" smtClean="0">
+              <a:rPr lang="zh-CN" altLang="en-US" sz="4800" b="1" dirty="0">
                 <a:solidFill>
                   <a:srgbClr val="660033"/>
                 </a:solidFill>
                 <a:latin typeface="微軟正黑體" pitchFamily="34" charset="-120"/>
                 <a:ea typeface="微軟正黑體" pitchFamily="34" charset="-120"/>
               </a:rPr>
-              <a:t>袮的杖和竿都安慰我</a:t>
-            </a:r>
-            <a:endParaRPr lang="zh-TW" altLang="en-US" sz="4800" b="1" dirty="0" smtClean="0">
+              <a:t>祢的杖和竿都安慰我</a:t>
+            </a:r>
+            <a:endParaRPr lang="zh-TW" altLang="en-US" sz="4800" b="1" dirty="0">
               <a:solidFill>
                 <a:srgbClr val="660033"/>
               </a:solidFill>
@@ -4412,7 +4356,7 @@
           <a:p>
             <a:pPr algn="ctr"/>
             <a:r>
-              <a:rPr lang="en-US" sz="2800" b="1" dirty="0" smtClean="0">
+              <a:rPr lang="en-US" sz="2800" b="1" dirty="0">
                 <a:solidFill>
                   <a:srgbClr val="660033"/>
                 </a:solidFill>
@@ -4422,17 +4366,17 @@
               <a:t>( </a:t>
             </a:r>
             <a:r>
-              <a:rPr lang="zh-CN" altLang="en-US" sz="2800" b="1" dirty="0" smtClean="0">
+              <a:rPr lang="zh-CN" altLang="en-US" sz="2800" b="1" dirty="0">
                 <a:solidFill>
                   <a:srgbClr val="660033"/>
                 </a:solidFill>
                 <a:latin typeface="Microsoft JhengHei" panose="020B0604030504040204" pitchFamily="34" charset="-120"/>
                 <a:ea typeface="Microsoft JhengHei" panose="020B0604030504040204" pitchFamily="34" charset="-120"/>
               </a:rPr>
-              <a:t>正</a:t>
-            </a:r>
-            <a:r>
-              <a:rPr lang="en-US" sz="2800" b="1" dirty="0" smtClean="0">
+              <a:t>正歌</a:t>
+            </a:r>
+            <a:r>
+              <a:rPr lang="en-US" sz="2800" b="1" dirty="0">
                 <a:solidFill>
                   <a:srgbClr val="660033"/>
                 </a:solidFill>
@@ -4501,7 +4445,7 @@
               <a:buNone/>
             </a:pPr>
             <a:r>
-              <a:rPr lang="zh-CN" altLang="en-US" sz="4800" b="1" dirty="0" smtClean="0">
+              <a:rPr lang="zh-CN" altLang="en-US" sz="4800" b="1" dirty="0">
                 <a:solidFill>
                   <a:srgbClr val="660033"/>
                 </a:solidFill>
@@ -4510,7 +4454,7 @@
               </a:rPr>
               <a:t>在我敵人面前</a:t>
             </a:r>
-            <a:endParaRPr lang="en-US" altLang="zh-CN" sz="4800" b="1" dirty="0" smtClean="0">
+            <a:endParaRPr lang="en-US" altLang="zh-CN" sz="4800" b="1" dirty="0">
               <a:solidFill>
                 <a:srgbClr val="660033"/>
               </a:solidFill>
@@ -4523,16 +4467,16 @@
               <a:buNone/>
             </a:pPr>
             <a:r>
-              <a:rPr lang="zh-CN" altLang="en-US" sz="4800" b="1" dirty="0" smtClean="0">
+              <a:rPr lang="zh-CN" altLang="en-US" sz="4800" b="1" dirty="0">
                 <a:solidFill>
                   <a:srgbClr val="660033"/>
                 </a:solidFill>
                 <a:latin typeface="微軟正黑體" pitchFamily="34" charset="-120"/>
                 <a:ea typeface="微軟正黑體" pitchFamily="34" charset="-120"/>
               </a:rPr>
-              <a:t>袮為我擺設筵席</a:t>
-            </a:r>
-            <a:endParaRPr lang="en-US" altLang="zh-CN" sz="4800" b="1" dirty="0" smtClean="0">
+              <a:t>祢為我擺設筵席</a:t>
+            </a:r>
+            <a:endParaRPr lang="en-US" altLang="zh-CN" sz="4800" b="1" dirty="0">
               <a:solidFill>
                 <a:srgbClr val="660033"/>
               </a:solidFill>
@@ -4566,7 +4510,7 @@
           <a:p>
             <a:pPr algn="ctr"/>
             <a:r>
-              <a:rPr lang="en-US" sz="2800" b="1" dirty="0" smtClean="0">
+              <a:rPr lang="en-US" sz="2800" b="1" dirty="0">
                 <a:solidFill>
                   <a:srgbClr val="660033"/>
                 </a:solidFill>
@@ -4576,17 +4520,17 @@
               <a:t>( </a:t>
             </a:r>
             <a:r>
-              <a:rPr lang="zh-CN" altLang="en-US" sz="2800" b="1" dirty="0" smtClean="0">
+              <a:rPr lang="zh-CN" altLang="en-US" sz="2800" b="1" dirty="0">
                 <a:solidFill>
                   <a:srgbClr val="660033"/>
                 </a:solidFill>
                 <a:latin typeface="Microsoft JhengHei" panose="020B0604030504040204" pitchFamily="34" charset="-120"/>
                 <a:ea typeface="Microsoft JhengHei" panose="020B0604030504040204" pitchFamily="34" charset="-120"/>
               </a:rPr>
-              <a:t>正</a:t>
-            </a:r>
-            <a:r>
-              <a:rPr lang="en-US" sz="2800" b="1" dirty="0" smtClean="0">
+              <a:t>正歌</a:t>
+            </a:r>
+            <a:r>
+              <a:rPr lang="en-US" sz="2800" b="1" dirty="0">
                 <a:solidFill>
                   <a:srgbClr val="660033"/>
                 </a:solidFill>
@@ -4655,16 +4599,16 @@
               <a:buNone/>
             </a:pPr>
             <a:r>
-              <a:rPr lang="zh-CN" altLang="en-US" sz="4800" b="1" dirty="0" smtClean="0">
+              <a:rPr lang="zh-CN" altLang="en-US" sz="4800" b="1" dirty="0">
                 <a:solidFill>
                   <a:srgbClr val="660033"/>
                 </a:solidFill>
                 <a:latin typeface="微軟正黑體" pitchFamily="34" charset="-120"/>
                 <a:ea typeface="微軟正黑體" pitchFamily="34" charset="-120"/>
               </a:rPr>
-              <a:t>袮用油膏了我的頭</a:t>
-            </a:r>
-            <a:endParaRPr lang="en-US" altLang="zh-CN" sz="4800" b="1" dirty="0" smtClean="0">
+              <a:t>祢用油膏了我的頭</a:t>
+            </a:r>
+            <a:endParaRPr lang="en-US" altLang="zh-CN" sz="4800" b="1" dirty="0">
               <a:solidFill>
                 <a:srgbClr val="660033"/>
               </a:solidFill>
@@ -4677,7 +4621,7 @@
               <a:buNone/>
             </a:pPr>
             <a:r>
-              <a:rPr lang="zh-CN" altLang="en-US" sz="4800" b="1" dirty="0" smtClean="0">
+              <a:rPr lang="zh-CN" altLang="en-US" sz="4800" b="1" dirty="0">
                 <a:solidFill>
                   <a:srgbClr val="660033"/>
                 </a:solidFill>
@@ -4686,7 +4630,7 @@
               </a:rPr>
               <a:t>使我福杯滿溢</a:t>
             </a:r>
-            <a:endParaRPr lang="zh-TW" altLang="en-US" sz="4800" b="1" dirty="0" smtClean="0">
+            <a:endParaRPr lang="zh-TW" altLang="en-US" sz="4800" b="1" dirty="0">
               <a:solidFill>
                 <a:srgbClr val="660033"/>
               </a:solidFill>
@@ -4720,7 +4664,7 @@
           <a:p>
             <a:pPr algn="ctr"/>
             <a:r>
-              <a:rPr lang="en-US" sz="2800" b="1" dirty="0" smtClean="0">
+              <a:rPr lang="en-US" sz="2800" b="1" dirty="0">
                 <a:solidFill>
                   <a:srgbClr val="660033"/>
                 </a:solidFill>
@@ -4730,17 +4674,17 @@
               <a:t>( </a:t>
             </a:r>
             <a:r>
-              <a:rPr lang="zh-CN" altLang="en-US" sz="2800" b="1" dirty="0" smtClean="0">
+              <a:rPr lang="zh-CN" altLang="en-US" sz="2800" b="1" dirty="0">
                 <a:solidFill>
                   <a:srgbClr val="660033"/>
                 </a:solidFill>
                 <a:latin typeface="Microsoft JhengHei" panose="020B0604030504040204" pitchFamily="34" charset="-120"/>
                 <a:ea typeface="Microsoft JhengHei" panose="020B0604030504040204" pitchFamily="34" charset="-120"/>
               </a:rPr>
-              <a:t>正</a:t>
-            </a:r>
-            <a:r>
-              <a:rPr lang="en-US" sz="2800" b="1" dirty="0" smtClean="0">
+              <a:t>正歌</a:t>
+            </a:r>
+            <a:r>
+              <a:rPr lang="en-US" sz="2800" b="1" dirty="0">
                 <a:solidFill>
                   <a:srgbClr val="660033"/>
                 </a:solidFill>
